--- a/single_day/slides/06_closing.pptx
+++ b/single_day/slides/06_closing.pptx
@@ -1833,7 +1833,7 @@
                 <a:ea typeface="Arial" pitchFamily="34" charset="-122"/>
                 <a:cs typeface="Arial" pitchFamily="34" charset="-120"/>
               </a:rPr>
-              <a:t>Gem Hunter dressed in the studio style: the new gem set, lighting, VFX — before/after.</a:t>
+              <a:t>Gem Hunter dressed in the studio style: the new gem set and lighting — before/after.</a:t>
             </a:r>
             <a:endParaRPr lang="en-US" sz="1150" dirty="0"/>
           </a:p>
